--- a/TuneTribe.pptx
+++ b/TuneTribe.pptx
@@ -122,7 +122,7 @@
 <file path=ppt/revisionInfo.xml><?xml version="1.0" encoding="utf-8"?>
 <p1510:revInfo xmlns:a="http://schemas.openxmlformats.org/drawingml/2006/main" xmlns:r="http://schemas.openxmlformats.org/officeDocument/2006/relationships" xmlns:p1510="http://schemas.microsoft.com/office/powerpoint/2015/10/main">
   <p1510:revLst>
-    <p1510:client id="{FF32E8D1-ABB6-47E3-8E4B-B0E0B8E7A5CC}" v="2" dt="2024-02-26T20:46:38.585"/>
+    <p1510:client id="{FF32E8D1-ABB6-47E3-8E4B-B0E0B8E7A5CC}" v="3" dt="2024-02-26T21:52:00.227"/>
   </p1510:revLst>
 </p1510:revInfo>
 </file>
@@ -362,12 +362,12 @@
   <pc:docChgLst>
     <pc:chgData name="Mauricio Garcia-Paez (He/Him/His)" userId="4a68df13-fe8d-45f0-bbc7-b14bd5e6ab7a" providerId="ADAL" clId="{FF32E8D1-ABB6-47E3-8E4B-B0E0B8E7A5CC}"/>
     <pc:docChg chg="undo custSel addSld modSld">
-      <pc:chgData name="Mauricio Garcia-Paez (He/Him/His)" userId="4a68df13-fe8d-45f0-bbc7-b14bd5e6ab7a" providerId="ADAL" clId="{FF32E8D1-ABB6-47E3-8E4B-B0E0B8E7A5CC}" dt="2024-02-26T21:51:02.624" v="1149" actId="20577"/>
+      <pc:chgData name="Mauricio Garcia-Paez (He/Him/His)" userId="4a68df13-fe8d-45f0-bbc7-b14bd5e6ab7a" providerId="ADAL" clId="{FF32E8D1-ABB6-47E3-8E4B-B0E0B8E7A5CC}" dt="2024-02-26T21:54:28.575" v="1300" actId="20577"/>
       <pc:docMkLst>
         <pc:docMk/>
       </pc:docMkLst>
       <pc:sldChg chg="addSp delSp modSp mod addAnim delDesignElem">
-        <pc:chgData name="Mauricio Garcia-Paez (He/Him/His)" userId="4a68df13-fe8d-45f0-bbc7-b14bd5e6ab7a" providerId="ADAL" clId="{FF32E8D1-ABB6-47E3-8E4B-B0E0B8E7A5CC}" dt="2024-02-26T20:46:41.051" v="153"/>
+        <pc:chgData name="Mauricio Garcia-Paez (He/Him/His)" userId="4a68df13-fe8d-45f0-bbc7-b14bd5e6ab7a" providerId="ADAL" clId="{FF32E8D1-ABB6-47E3-8E4B-B0E0B8E7A5CC}" dt="2024-02-26T21:52:00.227" v="1150" actId="20577"/>
         <pc:sldMkLst>
           <pc:docMk/>
           <pc:sldMk cId="3395340385" sldId="256"/>
@@ -381,7 +381,7 @@
           </ac:spMkLst>
         </pc:spChg>
         <pc:spChg chg="mod">
-          <ac:chgData name="Mauricio Garcia-Paez (He/Him/His)" userId="4a68df13-fe8d-45f0-bbc7-b14bd5e6ab7a" providerId="ADAL" clId="{FF32E8D1-ABB6-47E3-8E4B-B0E0B8E7A5CC}" dt="2024-02-26T20:46:41.051" v="151" actId="26606"/>
+          <ac:chgData name="Mauricio Garcia-Paez (He/Him/His)" userId="4a68df13-fe8d-45f0-bbc7-b14bd5e6ab7a" providerId="ADAL" clId="{FF32E8D1-ABB6-47E3-8E4B-B0E0B8E7A5CC}" dt="2024-02-26T21:52:00.227" v="1150" actId="20577"/>
           <ac:spMkLst>
             <pc:docMk/>
             <pc:sldMk cId="3395340385" sldId="256"/>
@@ -731,7 +731,7 @@
         </pc:picChg>
       </pc:sldChg>
       <pc:sldChg chg="addSp modSp new mod setBg">
-        <pc:chgData name="Mauricio Garcia-Paez (He/Him/His)" userId="4a68df13-fe8d-45f0-bbc7-b14bd5e6ab7a" providerId="ADAL" clId="{FF32E8D1-ABB6-47E3-8E4B-B0E0B8E7A5CC}" dt="2024-02-26T21:35:53.903" v="1026" actId="26606"/>
+        <pc:chgData name="Mauricio Garcia-Paez (He/Him/His)" userId="4a68df13-fe8d-45f0-bbc7-b14bd5e6ab7a" providerId="ADAL" clId="{FF32E8D1-ABB6-47E3-8E4B-B0E0B8E7A5CC}" dt="2024-02-26T21:54:28.575" v="1300" actId="20577"/>
         <pc:sldMkLst>
           <pc:docMk/>
           <pc:sldMk cId="3305000176" sldId="260"/>
@@ -745,7 +745,7 @@
           </ac:spMkLst>
         </pc:spChg>
         <pc:spChg chg="mod">
-          <ac:chgData name="Mauricio Garcia-Paez (He/Him/His)" userId="4a68df13-fe8d-45f0-bbc7-b14bd5e6ab7a" providerId="ADAL" clId="{FF32E8D1-ABB6-47E3-8E4B-B0E0B8E7A5CC}" dt="2024-02-26T21:35:53.903" v="1026" actId="26606"/>
+          <ac:chgData name="Mauricio Garcia-Paez (He/Him/His)" userId="4a68df13-fe8d-45f0-bbc7-b14bd5e6ab7a" providerId="ADAL" clId="{FF32E8D1-ABB6-47E3-8E4B-B0E0B8E7A5CC}" dt="2024-02-26T21:54:28.575" v="1300" actId="20577"/>
           <ac:spMkLst>
             <pc:docMk/>
             <pc:sldMk cId="3305000176" sldId="260"/>
@@ -11260,12 +11260,12 @@
           <a:lstStyle/>
           <a:p>
             <a:r>
-              <a:rPr lang="en-US">
+              <a:rPr lang="en-US" dirty="0">
                 <a:solidFill>
                   <a:schemeClr val="tx2"/>
                 </a:solidFill>
               </a:rPr>
-              <a:t>Mauricio, Shauna, Emmanuel, Kanan</a:t>
+              <a:t>Mauricio, Shauna, Emmanuel, Kannan</a:t>
             </a:r>
           </a:p>
         </p:txBody>
@@ -11638,12 +11638,20 @@
           <a:lstStyle/>
           <a:p>
             <a:r>
-              <a:rPr lang="en-US" sz="1800">
+              <a:rPr lang="en-US" sz="1800" dirty="0" err="1">
                 <a:solidFill>
                   <a:schemeClr val="tx2"/>
                 </a:solidFill>
               </a:rPr>
-              <a:t>TuneTribe is a social platform designed for music enthusiast and artists alike, A place where people can share their music taste and where small artists can grow their follower base.</a:t>
+              <a:t>TuneTribe</a:t>
+            </a:r>
+            <a:r>
+              <a:rPr lang="en-US" sz="1800" dirty="0">
+                <a:solidFill>
+                  <a:schemeClr val="tx2"/>
+                </a:solidFill>
+              </a:rPr>
+              <a:t> is a social platform designed for music enthusiast and artists alike, A place where people can share their music taste and where small artists can grow their follower base.</a:t>
             </a:r>
           </a:p>
         </p:txBody>
@@ -23631,7 +23639,7 @@
           <a:lstStyle/>
           <a:p>
             <a:r>
-              <a:rPr lang="en-US" sz="1800">
+              <a:rPr lang="en-US" sz="1800" dirty="0">
                 <a:solidFill>
                   <a:schemeClr val="tx2"/>
                 </a:solidFill>
@@ -23640,8 +23648,30 @@
             </a:r>
           </a:p>
           <a:p>
+            <a:pPr lvl="1"/>
             <a:r>
-              <a:rPr lang="en-US" sz="1800">
+              <a:rPr lang="en-US" sz="1400" dirty="0">
+                <a:solidFill>
+                  <a:schemeClr val="tx2"/>
+                </a:solidFill>
+              </a:rPr>
+              <a:t>Short Caption</a:t>
+            </a:r>
+          </a:p>
+          <a:p>
+            <a:pPr lvl="1"/>
+            <a:r>
+              <a:rPr lang="en-US" sz="1400" dirty="0">
+                <a:solidFill>
+                  <a:schemeClr val="tx2"/>
+                </a:solidFill>
+              </a:rPr>
+              <a:t>Song name and disc art</a:t>
+            </a:r>
+          </a:p>
+          <a:p>
+            <a:r>
+              <a:rPr lang="en-US" sz="1800" dirty="0">
                 <a:solidFill>
                   <a:schemeClr val="tx2"/>
                 </a:solidFill>
@@ -23651,17 +23681,41 @@
           </a:p>
           <a:p>
             <a:r>
-              <a:rPr lang="en-US" sz="1800">
+              <a:rPr lang="en-US" sz="1800" dirty="0">
                 <a:solidFill>
                   <a:schemeClr val="tx2"/>
                 </a:solidFill>
               </a:rPr>
-              <a:t>Add song to profile</a:t>
+              <a:t>Add songs to profile</a:t>
             </a:r>
           </a:p>
           <a:p>
+            <a:pPr lvl="1"/>
             <a:r>
-              <a:rPr lang="en-US" sz="1800">
+              <a:rPr lang="en-US" sz="1400" dirty="0">
+                <a:solidFill>
+                  <a:schemeClr val="tx2"/>
+                </a:solidFill>
+              </a:rPr>
+              <a:t>Display </a:t>
+            </a:r>
+            <a:r>
+              <a:rPr lang="en-US" sz="1400">
+                <a:solidFill>
+                  <a:schemeClr val="tx2"/>
+                </a:solidFill>
+              </a:rPr>
+              <a:t>your favorite songs</a:t>
+            </a:r>
+            <a:endParaRPr lang="en-US" sz="1400" dirty="0">
+              <a:solidFill>
+                <a:schemeClr val="tx2"/>
+              </a:solidFill>
+            </a:endParaRPr>
+          </a:p>
+          <a:p>
+            <a:r>
+              <a:rPr lang="en-US" sz="1800" dirty="0">
                 <a:solidFill>
                   <a:schemeClr val="tx2"/>
                 </a:solidFill>
@@ -23671,7 +23725,7 @@
           </a:p>
           <a:p>
             <a:r>
-              <a:rPr lang="en-US" sz="1800">
+              <a:rPr lang="en-US" sz="1800" dirty="0">
                 <a:solidFill>
                   <a:schemeClr val="tx2"/>
                 </a:solidFill>

--- a/TuneTribe.pptx
+++ b/TuneTribe.pptx
@@ -362,7 +362,7 @@
   <pc:docChgLst>
     <pc:chgData name="Mauricio Garcia-Paez (He/Him/His)" userId="4a68df13-fe8d-45f0-bbc7-b14bd5e6ab7a" providerId="ADAL" clId="{FF32E8D1-ABB6-47E3-8E4B-B0E0B8E7A5CC}"/>
     <pc:docChg chg="undo custSel addSld delSld modSld sldOrd">
-      <pc:chgData name="Mauricio Garcia-Paez (He/Him/His)" userId="4a68df13-fe8d-45f0-bbc7-b14bd5e6ab7a" providerId="ADAL" clId="{FF32E8D1-ABB6-47E3-8E4B-B0E0B8E7A5CC}" dt="2024-02-27T15:10:46.260" v="1391" actId="2696"/>
+      <pc:chgData name="Mauricio Garcia-Paez (He/Him/His)" userId="4a68df13-fe8d-45f0-bbc7-b14bd5e6ab7a" providerId="ADAL" clId="{FF32E8D1-ABB6-47E3-8E4B-B0E0B8E7A5CC}" dt="2024-02-27T19:30:23.920" v="1486" actId="20577"/>
       <pc:docMkLst>
         <pc:docMk/>
       </pc:docMkLst>
@@ -731,7 +731,7 @@
         </pc:picChg>
       </pc:sldChg>
       <pc:sldChg chg="addSp modSp new mod setBg">
-        <pc:chgData name="Mauricio Garcia-Paez (He/Him/His)" userId="4a68df13-fe8d-45f0-bbc7-b14bd5e6ab7a" providerId="ADAL" clId="{FF32E8D1-ABB6-47E3-8E4B-B0E0B8E7A5CC}" dt="2024-02-26T21:54:28.575" v="1300" actId="20577"/>
+        <pc:chgData name="Mauricio Garcia-Paez (He/Him/His)" userId="4a68df13-fe8d-45f0-bbc7-b14bd5e6ab7a" providerId="ADAL" clId="{FF32E8D1-ABB6-47E3-8E4B-B0E0B8E7A5CC}" dt="2024-02-27T19:30:23.920" v="1486" actId="20577"/>
         <pc:sldMkLst>
           <pc:docMk/>
           <pc:sldMk cId="3305000176" sldId="260"/>
@@ -745,7 +745,7 @@
           </ac:spMkLst>
         </pc:spChg>
         <pc:spChg chg="mod">
-          <ac:chgData name="Mauricio Garcia-Paez (He/Him/His)" userId="4a68df13-fe8d-45f0-bbc7-b14bd5e6ab7a" providerId="ADAL" clId="{FF32E8D1-ABB6-47E3-8E4B-B0E0B8E7A5CC}" dt="2024-02-26T21:54:28.575" v="1300" actId="20577"/>
+          <ac:chgData name="Mauricio Garcia-Paez (He/Him/His)" userId="4a68df13-fe8d-45f0-bbc7-b14bd5e6ab7a" providerId="ADAL" clId="{FF32E8D1-ABB6-47E3-8E4B-B0E0B8E7A5CC}" dt="2024-02-27T19:30:23.920" v="1486" actId="20577"/>
           <ac:spMkLst>
             <pc:docMk/>
             <pc:sldMk cId="3305000176" sldId="260"/>
@@ -23765,7 +23765,29 @@
                   <a:schemeClr val="tx2"/>
                 </a:solidFill>
               </a:rPr>
-              <a:t>Song name and disc art</a:t>
+              <a:t>Song name</a:t>
+            </a:r>
+          </a:p>
+          <a:p>
+            <a:pPr lvl="1"/>
+            <a:r>
+              <a:rPr lang="en-US" sz="1400" dirty="0">
+                <a:solidFill>
+                  <a:schemeClr val="tx2"/>
+                </a:solidFill>
+              </a:rPr>
+              <a:t>Disc art</a:t>
+            </a:r>
+          </a:p>
+          <a:p>
+            <a:pPr lvl="1"/>
+            <a:r>
+              <a:rPr lang="en-US" sz="1400" dirty="0">
+                <a:solidFill>
+                  <a:schemeClr val="tx2"/>
+                </a:solidFill>
+              </a:rPr>
+              <a:t>Short clip</a:t>
             </a:r>
           </a:p>
           <a:p>
@@ -23775,8 +23797,21 @@
                   <a:schemeClr val="tx2"/>
                 </a:solidFill>
               </a:rPr>
-              <a:t>Comment on posts</a:t>
+              <a:t>Comment </a:t>
             </a:r>
+            <a:r>
+              <a:rPr lang="en-US" sz="1800">
+                <a:solidFill>
+                  <a:schemeClr val="tx2"/>
+                </a:solidFill>
+              </a:rPr>
+              <a:t>and like posts</a:t>
+            </a:r>
+            <a:endParaRPr lang="en-US" sz="1800" dirty="0">
+              <a:solidFill>
+                <a:schemeClr val="tx2"/>
+              </a:solidFill>
+            </a:endParaRPr>
           </a:p>
           <a:p>
             <a:r>

--- a/TuneTribe.pptx
+++ b/TuneTribe.pptx
@@ -362,7 +362,7 @@
   <pc:docChgLst>
     <pc:chgData name="Mauricio Garcia-Paez (He/Him/His)" userId="4a68df13-fe8d-45f0-bbc7-b14bd5e6ab7a" providerId="ADAL" clId="{FF32E8D1-ABB6-47E3-8E4B-B0E0B8E7A5CC}"/>
     <pc:docChg chg="undo custSel addSld delSld modSld sldOrd">
-      <pc:chgData name="Mauricio Garcia-Paez (He/Him/His)" userId="4a68df13-fe8d-45f0-bbc7-b14bd5e6ab7a" providerId="ADAL" clId="{FF32E8D1-ABB6-47E3-8E4B-B0E0B8E7A5CC}" dt="2024-02-27T19:30:23.920" v="1486" actId="20577"/>
+      <pc:chgData name="Mauricio Garcia-Paez (He/Him/His)" userId="4a68df13-fe8d-45f0-bbc7-b14bd5e6ab7a" providerId="ADAL" clId="{FF32E8D1-ABB6-47E3-8E4B-B0E0B8E7A5CC}" dt="2024-02-27T15:10:46.260" v="1391" actId="2696"/>
       <pc:docMkLst>
         <pc:docMk/>
       </pc:docMkLst>
@@ -731,7 +731,7 @@
         </pc:picChg>
       </pc:sldChg>
       <pc:sldChg chg="addSp modSp new mod setBg">
-        <pc:chgData name="Mauricio Garcia-Paez (He/Him/His)" userId="4a68df13-fe8d-45f0-bbc7-b14bd5e6ab7a" providerId="ADAL" clId="{FF32E8D1-ABB6-47E3-8E4B-B0E0B8E7A5CC}" dt="2024-02-27T19:30:23.920" v="1486" actId="20577"/>
+        <pc:chgData name="Mauricio Garcia-Paez (He/Him/His)" userId="4a68df13-fe8d-45f0-bbc7-b14bd5e6ab7a" providerId="ADAL" clId="{FF32E8D1-ABB6-47E3-8E4B-B0E0B8E7A5CC}" dt="2024-02-26T21:54:28.575" v="1300" actId="20577"/>
         <pc:sldMkLst>
           <pc:docMk/>
           <pc:sldMk cId="3305000176" sldId="260"/>
@@ -745,7 +745,7 @@
           </ac:spMkLst>
         </pc:spChg>
         <pc:spChg chg="mod">
-          <ac:chgData name="Mauricio Garcia-Paez (He/Him/His)" userId="4a68df13-fe8d-45f0-bbc7-b14bd5e6ab7a" providerId="ADAL" clId="{FF32E8D1-ABB6-47E3-8E4B-B0E0B8E7A5CC}" dt="2024-02-27T19:30:23.920" v="1486" actId="20577"/>
+          <ac:chgData name="Mauricio Garcia-Paez (He/Him/His)" userId="4a68df13-fe8d-45f0-bbc7-b14bd5e6ab7a" providerId="ADAL" clId="{FF32E8D1-ABB6-47E3-8E4B-B0E0B8E7A5CC}" dt="2024-02-26T21:54:28.575" v="1300" actId="20577"/>
           <ac:spMkLst>
             <pc:docMk/>
             <pc:sldMk cId="3305000176" sldId="260"/>
@@ -23765,29 +23765,7 @@
                   <a:schemeClr val="tx2"/>
                 </a:solidFill>
               </a:rPr>
-              <a:t>Song name</a:t>
-            </a:r>
-          </a:p>
-          <a:p>
-            <a:pPr lvl="1"/>
-            <a:r>
-              <a:rPr lang="en-US" sz="1400" dirty="0">
-                <a:solidFill>
-                  <a:schemeClr val="tx2"/>
-                </a:solidFill>
-              </a:rPr>
-              <a:t>Disc art</a:t>
-            </a:r>
-          </a:p>
-          <a:p>
-            <a:pPr lvl="1"/>
-            <a:r>
-              <a:rPr lang="en-US" sz="1400" dirty="0">
-                <a:solidFill>
-                  <a:schemeClr val="tx2"/>
-                </a:solidFill>
-              </a:rPr>
-              <a:t>Short clip</a:t>
+              <a:t>Song name and disc art</a:t>
             </a:r>
           </a:p>
           <a:p>
@@ -23797,21 +23775,8 @@
                   <a:schemeClr val="tx2"/>
                 </a:solidFill>
               </a:rPr>
-              <a:t>Comment </a:t>
+              <a:t>Comment on posts</a:t>
             </a:r>
-            <a:r>
-              <a:rPr lang="en-US" sz="1800">
-                <a:solidFill>
-                  <a:schemeClr val="tx2"/>
-                </a:solidFill>
-              </a:rPr>
-              <a:t>and like posts</a:t>
-            </a:r>
-            <a:endParaRPr lang="en-US" sz="1800" dirty="0">
-              <a:solidFill>
-                <a:schemeClr val="tx2"/>
-              </a:solidFill>
-            </a:endParaRPr>
           </a:p>
           <a:p>
             <a:r>
@@ -23863,6 +23828,16 @@
                 </a:solidFill>
               </a:rPr>
               <a:t>Recommend songs to tribe mates</a:t>
+            </a:r>
+          </a:p>
+          <a:p>
+            <a:r>
+              <a:rPr lang="en-US" sz="1800" dirty="0">
+                <a:solidFill>
+                  <a:schemeClr val="tx2"/>
+                </a:solidFill>
+              </a:rPr>
+              <a:t>Login</a:t>
             </a:r>
           </a:p>
         </p:txBody>
@@ -27220,6 +27195,23 @@
               </a:rPr>
               <a:t>Friend other Artists</a:t>
             </a:r>
+          </a:p>
+          <a:p>
+            <a:r>
+              <a:rPr lang="en-US" sz="1800" dirty="0">
+                <a:solidFill>
+                  <a:schemeClr val="tx2"/>
+                </a:solidFill>
+              </a:rPr>
+              <a:t>Login</a:t>
+            </a:r>
+          </a:p>
+          <a:p>
+            <a:endParaRPr lang="en-US" sz="1800" dirty="0">
+              <a:solidFill>
+                <a:schemeClr val="tx2"/>
+              </a:solidFill>
+            </a:endParaRPr>
           </a:p>
           <a:p>
             <a:endParaRPr lang="en-US" sz="1800" dirty="0">
@@ -30582,6 +30574,23 @@
               <a:t>Delete posts</a:t>
             </a:r>
           </a:p>
+          <a:p>
+            <a:r>
+              <a:rPr lang="en-US" sz="1800" dirty="0">
+                <a:solidFill>
+                  <a:schemeClr val="tx2"/>
+                </a:solidFill>
+              </a:rPr>
+              <a:t>Login</a:t>
+            </a:r>
+          </a:p>
+          <a:p>
+            <a:endParaRPr lang="en-US" sz="1800" dirty="0">
+              <a:solidFill>
+                <a:schemeClr val="tx2"/>
+              </a:solidFill>
+            </a:endParaRPr>
+          </a:p>
         </p:txBody>
       </p:sp>
     </p:spTree>
@@ -33967,6 +33976,16 @@
             </a:r>
           </a:p>
           <a:p>
+            <a:r>
+              <a:rPr lang="en-US" sz="1800" dirty="0">
+                <a:solidFill>
+                  <a:schemeClr val="tx2"/>
+                </a:solidFill>
+              </a:rPr>
+              <a:t>Login</a:t>
+            </a:r>
+          </a:p>
+          <a:p>
             <a:endParaRPr lang="en-US" sz="1800" dirty="0">
               <a:solidFill>
                 <a:schemeClr val="tx2"/>

--- a/TuneTribe.pptx
+++ b/TuneTribe.pptx
@@ -930,6 +930,30 @@
             <pc:docMk/>
             <pc:sldMk cId="2580138245" sldId="264"/>
             <ac:spMk id="3" creationId="{CDA283E0-FF56-1C72-48A0-806165345F3F}"/>
+          </ac:spMkLst>
+        </pc:spChg>
+      </pc:sldChg>
+    </pc:docChg>
+  </pc:docChgLst>
+  <pc:docChgLst>
+    <pc:chgData name="Mauricio Garcia-Paez (He/Him/His)" userId="4a68df13-fe8d-45f0-bbc7-b14bd5e6ab7a" providerId="ADAL" clId="{F5989A0C-615C-493A-8891-97B2591AD4CA}"/>
+    <pc:docChg chg="custSel modSld">
+      <pc:chgData name="Mauricio Garcia-Paez (He/Him/His)" userId="4a68df13-fe8d-45f0-bbc7-b14bd5e6ab7a" providerId="ADAL" clId="{F5989A0C-615C-493A-8891-97B2591AD4CA}" dt="2024-02-27T19:53:26.338" v="45" actId="6549"/>
+      <pc:docMkLst>
+        <pc:docMk/>
+      </pc:docMkLst>
+      <pc:sldChg chg="modSp mod">
+        <pc:chgData name="Mauricio Garcia-Paez (He/Him/His)" userId="4a68df13-fe8d-45f0-bbc7-b14bd5e6ab7a" providerId="ADAL" clId="{F5989A0C-615C-493A-8891-97B2591AD4CA}" dt="2024-02-27T19:53:26.338" v="45" actId="6549"/>
+        <pc:sldMkLst>
+          <pc:docMk/>
+          <pc:sldMk cId="3305000176" sldId="260"/>
+        </pc:sldMkLst>
+        <pc:spChg chg="mod">
+          <ac:chgData name="Mauricio Garcia-Paez (He/Him/His)" userId="4a68df13-fe8d-45f0-bbc7-b14bd5e6ab7a" providerId="ADAL" clId="{F5989A0C-615C-493A-8891-97B2591AD4CA}" dt="2024-02-27T19:53:26.338" v="45" actId="6549"/>
+          <ac:spMkLst>
+            <pc:docMk/>
+            <pc:sldMk cId="3305000176" sldId="260"/>
+            <ac:spMk id="3" creationId="{DDC2C3FC-7900-C6F3-D0BA-996678632FF6}"/>
           </ac:spMkLst>
         </pc:spChg>
       </pc:sldChg>
@@ -23769,13 +23793,32 @@
             </a:r>
           </a:p>
           <a:p>
+            <a:pPr lvl="1"/>
+            <a:r>
+              <a:rPr lang="en-US" sz="1400" dirty="0">
+                <a:solidFill>
+                  <a:schemeClr val="tx2"/>
+                </a:solidFill>
+              </a:rPr>
+              <a:t>Short clip of the song</a:t>
+            </a:r>
+          </a:p>
+          <a:p>
+            <a:r>
+              <a:rPr lang="en-US" sz="1800">
+                <a:solidFill>
+                  <a:schemeClr val="tx2"/>
+                </a:solidFill>
+              </a:rPr>
+              <a:t>Comment/like </a:t>
+            </a:r>
             <a:r>
               <a:rPr lang="en-US" sz="1800" dirty="0">
                 <a:solidFill>
                   <a:schemeClr val="tx2"/>
                 </a:solidFill>
               </a:rPr>
-              <a:t>Comment on posts</a:t>
+              <a:t>posts</a:t>
             </a:r>
           </a:p>
           <a:p>
